--- a/fig/fsc-private-data.pptx
+++ b/fig/fsc-private-data.pptx
@@ -104,6 +104,11 @@
       </a:defRPr>
     </a:lvl9pPr>
   </p:defaultTextStyle>
+  <p:extLst>
+    <p:ext uri="{EFAFB233-063F-42B5-8137-9DF3F51BA10A}">
+      <p15:sldGuideLst xmlns:p15="http://schemas.microsoft.com/office/powerpoint/2012/main"/>
+    </p:ext>
+  </p:extLst>
 </p:presentation>
 </file>
 
@@ -256,7 +261,7 @@
           <a:p>
             <a:fld id="{D569688E-617D-3141-A144-D95BBDEA8366}" type="datetimeFigureOut">
               <a:rPr lang="en-US" smtClean="0"/>
-              <a:t>11/20/19</a:t>
+              <a:t>12/2/19</a:t>
             </a:fld>
             <a:endParaRPr lang="en-US"/>
           </a:p>
@@ -456,7 +461,7 @@
           <a:p>
             <a:fld id="{D569688E-617D-3141-A144-D95BBDEA8366}" type="datetimeFigureOut">
               <a:rPr lang="en-US" smtClean="0"/>
-              <a:t>11/20/19</a:t>
+              <a:t>12/2/19</a:t>
             </a:fld>
             <a:endParaRPr lang="en-US"/>
           </a:p>
@@ -666,7 +671,7 @@
           <a:p>
             <a:fld id="{D569688E-617D-3141-A144-D95BBDEA8366}" type="datetimeFigureOut">
               <a:rPr lang="en-US" smtClean="0"/>
-              <a:t>11/20/19</a:t>
+              <a:t>12/2/19</a:t>
             </a:fld>
             <a:endParaRPr lang="en-US"/>
           </a:p>
@@ -866,7 +871,7 @@
           <a:p>
             <a:fld id="{D569688E-617D-3141-A144-D95BBDEA8366}" type="datetimeFigureOut">
               <a:rPr lang="en-US" smtClean="0"/>
-              <a:t>11/20/19</a:t>
+              <a:t>12/2/19</a:t>
             </a:fld>
             <a:endParaRPr lang="en-US"/>
           </a:p>
@@ -1142,7 +1147,7 @@
           <a:p>
             <a:fld id="{D569688E-617D-3141-A144-D95BBDEA8366}" type="datetimeFigureOut">
               <a:rPr lang="en-US" smtClean="0"/>
-              <a:t>11/20/19</a:t>
+              <a:t>12/2/19</a:t>
             </a:fld>
             <a:endParaRPr lang="en-US"/>
           </a:p>
@@ -1410,7 +1415,7 @@
           <a:p>
             <a:fld id="{D569688E-617D-3141-A144-D95BBDEA8366}" type="datetimeFigureOut">
               <a:rPr lang="en-US" smtClean="0"/>
-              <a:t>11/20/19</a:t>
+              <a:t>12/2/19</a:t>
             </a:fld>
             <a:endParaRPr lang="en-US"/>
           </a:p>
@@ -1825,7 +1830,7 @@
           <a:p>
             <a:fld id="{D569688E-617D-3141-A144-D95BBDEA8366}" type="datetimeFigureOut">
               <a:rPr lang="en-US" smtClean="0"/>
-              <a:t>11/20/19</a:t>
+              <a:t>12/2/19</a:t>
             </a:fld>
             <a:endParaRPr lang="en-US"/>
           </a:p>
@@ -1967,7 +1972,7 @@
           <a:p>
             <a:fld id="{D569688E-617D-3141-A144-D95BBDEA8366}" type="datetimeFigureOut">
               <a:rPr lang="en-US" smtClean="0"/>
-              <a:t>11/20/19</a:t>
+              <a:t>12/2/19</a:t>
             </a:fld>
             <a:endParaRPr lang="en-US"/>
           </a:p>
@@ -2080,7 +2085,7 @@
           <a:p>
             <a:fld id="{D569688E-617D-3141-A144-D95BBDEA8366}" type="datetimeFigureOut">
               <a:rPr lang="en-US" smtClean="0"/>
-              <a:t>11/20/19</a:t>
+              <a:t>12/2/19</a:t>
             </a:fld>
             <a:endParaRPr lang="en-US"/>
           </a:p>
@@ -2393,7 +2398,7 @@
           <a:p>
             <a:fld id="{D569688E-617D-3141-A144-D95BBDEA8366}" type="datetimeFigureOut">
               <a:rPr lang="en-US" smtClean="0"/>
-              <a:t>11/20/19</a:t>
+              <a:t>12/2/19</a:t>
             </a:fld>
             <a:endParaRPr lang="en-US"/>
           </a:p>
@@ -2682,7 +2687,7 @@
           <a:p>
             <a:fld id="{D569688E-617D-3141-A144-D95BBDEA8366}" type="datetimeFigureOut">
               <a:rPr lang="en-US" smtClean="0"/>
-              <a:t>11/20/19</a:t>
+              <a:t>12/2/19</a:t>
             </a:fld>
             <a:endParaRPr lang="en-US"/>
           </a:p>
@@ -2925,7 +2930,7 @@
           <a:p>
             <a:fld id="{D569688E-617D-3141-A144-D95BBDEA8366}" type="datetimeFigureOut">
               <a:rPr lang="en-US" smtClean="0"/>
-              <a:t>11/20/19</a:t>
+              <a:t>12/2/19</a:t>
             </a:fld>
             <a:endParaRPr lang="en-US"/>
           </a:p>
@@ -3356,8 +3361,8 @@
         </p:nvSpPr>
         <p:spPr>
           <a:xfrm>
-            <a:off x="6873765" y="3689931"/>
-            <a:ext cx="1140379" cy="294290"/>
+            <a:off x="5946915" y="3689931"/>
+            <a:ext cx="1142892" cy="294290"/>
           </a:xfrm>
           <a:prstGeom prst="rect">
             <a:avLst/>
@@ -3415,8 +3420,8 @@
         </p:nvSpPr>
         <p:spPr>
           <a:xfrm>
-            <a:off x="8429293" y="3692557"/>
-            <a:ext cx="1313802" cy="294290"/>
+            <a:off x="7565036" y="3692557"/>
+            <a:ext cx="974192" cy="294290"/>
           </a:xfrm>
           <a:prstGeom prst="rect">
             <a:avLst/>
@@ -3466,8 +3471,8 @@
         </p:nvSpPr>
         <p:spPr>
           <a:xfrm>
-            <a:off x="5047588" y="3689930"/>
-            <a:ext cx="1411027" cy="294291"/>
+            <a:off x="4395768" y="3689930"/>
+            <a:ext cx="1347232" cy="294291"/>
           </a:xfrm>
           <a:prstGeom prst="rect">
             <a:avLst/>
@@ -3522,8 +3527,8 @@
         </p:nvSpPr>
         <p:spPr>
           <a:xfrm>
-            <a:off x="3683869" y="3689929"/>
-            <a:ext cx="893397" cy="296917"/>
+            <a:off x="3265146" y="3689929"/>
+            <a:ext cx="974192" cy="296917"/>
           </a:xfrm>
           <a:prstGeom prst="rect">
             <a:avLst/>
@@ -3581,8 +3586,8 @@
         </p:nvSpPr>
         <p:spPr>
           <a:xfrm>
-            <a:off x="2249224" y="3689931"/>
-            <a:ext cx="893397" cy="294290"/>
+            <a:off x="2365232" y="3689931"/>
+            <a:ext cx="777389" cy="294290"/>
           </a:xfrm>
           <a:prstGeom prst="rect">
             <a:avLst/>
@@ -3640,8 +3645,8 @@
         </p:nvSpPr>
         <p:spPr>
           <a:xfrm>
-            <a:off x="2219407" y="5638241"/>
-            <a:ext cx="7523688" cy="315283"/>
+            <a:off x="2365232" y="5628671"/>
+            <a:ext cx="7233495" cy="254236"/>
           </a:xfrm>
           <a:prstGeom prst="rect">
             <a:avLst/>
@@ -3669,266 +3674,30 @@
           <a:p>
             <a:pPr algn="ctr"/>
             <a:r>
-              <a:rPr lang="en-US" sz="1600" b="1" dirty="0">
+              <a:rPr lang="en-US" sz="1700" b="1" dirty="0">
                 <a:latin typeface="Centaur" panose="02030504050205020304" pitchFamily="18" charset="77"/>
               </a:rPr>
-              <a:t>Order IDs, Product IDs, Lot IDs, Parties involved in each transactions, Hash of private data</a:t>
-            </a:r>
-          </a:p>
-        </p:txBody>
-      </p:sp>
-      <p:sp>
-        <p:nvSpPr>
-          <p:cNvPr id="10" name="Rounded Rectangle 9">
-            <a:extLst>
-              <a:ext uri="{FF2B5EF4-FFF2-40B4-BE49-F238E27FC236}">
-                <a16:creationId xmlns:a16="http://schemas.microsoft.com/office/drawing/2014/main" id="{17ACA021-58E8-4346-BE6F-23F98D8C92E9}"/>
-              </a:ext>
-            </a:extLst>
-          </p:cNvPr>
-          <p:cNvSpPr/>
+              <a:t>Order IDs, Product &amp; Lot IDs, Parties involved in each transactions, Hash of private data</a:t>
+            </a:r>
+          </a:p>
+        </p:txBody>
+      </p:sp>
+      <p:sp>
+        <p:nvSpPr>
+          <p:cNvPr id="14" name="TextBox 13">
+            <a:extLst>
+              <a:ext uri="{FF2B5EF4-FFF2-40B4-BE49-F238E27FC236}">
+                <a16:creationId xmlns:a16="http://schemas.microsoft.com/office/drawing/2014/main" id="{508D13A8-DA75-954D-83B1-1D3F66B5C90A}"/>
+              </a:ext>
+            </a:extLst>
+          </p:cNvPr>
+          <p:cNvSpPr txBox="1"/>
           <p:nvPr/>
         </p:nvSpPr>
         <p:spPr>
           <a:xfrm>
-            <a:off x="2451711" y="3984221"/>
-            <a:ext cx="1313803" cy="739836"/>
-          </a:xfrm>
-          <a:prstGeom prst="roundRect">
-            <a:avLst/>
-          </a:prstGeom>
-          <a:solidFill>
-            <a:srgbClr val="00B0F0"/>
-          </a:solidFill>
-          <a:ln>
-            <a:solidFill>
-              <a:srgbClr val="00B0F0"/>
-            </a:solidFill>
-          </a:ln>
-        </p:spPr>
-        <p:style>
-          <a:lnRef idx="2">
-            <a:schemeClr val="accent1">
-              <a:shade val="50000"/>
-            </a:schemeClr>
-          </a:lnRef>
-          <a:fillRef idx="1">
-            <a:schemeClr val="accent1"/>
-          </a:fillRef>
-          <a:effectRef idx="0">
-            <a:schemeClr val="accent1"/>
-          </a:effectRef>
-          <a:fontRef idx="minor">
-            <a:schemeClr val="lt1"/>
-          </a:fontRef>
-        </p:style>
-        <p:txBody>
-          <a:bodyPr rtlCol="0" anchor="ctr"/>
-          <a:lstStyle/>
-          <a:p>
-            <a:pPr algn="ctr"/>
-            <a:r>
-              <a:rPr lang="en-US" sz="1600" b="1" dirty="0">
-                <a:latin typeface="Centaur" panose="02030504050205020304" pitchFamily="18" charset="77"/>
-              </a:rPr>
-              <a:t>Order details, Invoice, Proof of payment</a:t>
-            </a:r>
-          </a:p>
-        </p:txBody>
-      </p:sp>
-      <p:sp>
-        <p:nvSpPr>
-          <p:cNvPr id="11" name="Rounded Rectangle 10">
-            <a:extLst>
-              <a:ext uri="{FF2B5EF4-FFF2-40B4-BE49-F238E27FC236}">
-                <a16:creationId xmlns:a16="http://schemas.microsoft.com/office/drawing/2014/main" id="{50F938C3-083B-3C42-8E86-D75AA8B33095}"/>
-              </a:ext>
-            </a:extLst>
-          </p:cNvPr>
-          <p:cNvSpPr/>
-          <p:nvPr/>
-        </p:nvSpPr>
-        <p:spPr>
-          <a:xfrm>
-            <a:off x="4024378" y="3989364"/>
-            <a:ext cx="1313803" cy="739836"/>
-          </a:xfrm>
-          <a:prstGeom prst="roundRect">
-            <a:avLst/>
-          </a:prstGeom>
-          <a:solidFill>
-            <a:srgbClr val="00B0F0"/>
-          </a:solidFill>
-          <a:ln>
-            <a:solidFill>
-              <a:srgbClr val="00B0F0"/>
-            </a:solidFill>
-          </a:ln>
-        </p:spPr>
-        <p:style>
-          <a:lnRef idx="2">
-            <a:schemeClr val="accent1">
-              <a:shade val="50000"/>
-            </a:schemeClr>
-          </a:lnRef>
-          <a:fillRef idx="1">
-            <a:schemeClr val="accent1"/>
-          </a:fillRef>
-          <a:effectRef idx="0">
-            <a:schemeClr val="accent1"/>
-          </a:effectRef>
-          <a:fontRef idx="minor">
-            <a:schemeClr val="lt1"/>
-          </a:fontRef>
-        </p:style>
-        <p:txBody>
-          <a:bodyPr rtlCol="0" anchor="ctr"/>
-          <a:lstStyle/>
-          <a:p>
-            <a:pPr algn="ctr"/>
-            <a:r>
-              <a:rPr lang="en-US" sz="1600" b="1" dirty="0">
-                <a:latin typeface="Centaur" panose="02030504050205020304" pitchFamily="18" charset="77"/>
-              </a:rPr>
-              <a:t>Order details, Invoice, Proof of payment</a:t>
-            </a:r>
-          </a:p>
-        </p:txBody>
-      </p:sp>
-      <p:sp>
-        <p:nvSpPr>
-          <p:cNvPr id="12" name="Rounded Rectangle 11">
-            <a:extLst>
-              <a:ext uri="{FF2B5EF4-FFF2-40B4-BE49-F238E27FC236}">
-                <a16:creationId xmlns:a16="http://schemas.microsoft.com/office/drawing/2014/main" id="{CBA1D4D9-8631-0D41-A1BC-99BF107582CE}"/>
-              </a:ext>
-            </a:extLst>
-          </p:cNvPr>
-          <p:cNvSpPr/>
-          <p:nvPr/>
-        </p:nvSpPr>
-        <p:spPr>
-          <a:xfrm>
-            <a:off x="5729785" y="3990662"/>
-            <a:ext cx="1313803" cy="739836"/>
-          </a:xfrm>
-          <a:prstGeom prst="roundRect">
-            <a:avLst/>
-          </a:prstGeom>
-          <a:solidFill>
-            <a:srgbClr val="00B0F0"/>
-          </a:solidFill>
-          <a:ln>
-            <a:solidFill>
-              <a:srgbClr val="00B0F0"/>
-            </a:solidFill>
-          </a:ln>
-        </p:spPr>
-        <p:style>
-          <a:lnRef idx="2">
-            <a:schemeClr val="accent1">
-              <a:shade val="50000"/>
-            </a:schemeClr>
-          </a:lnRef>
-          <a:fillRef idx="1">
-            <a:schemeClr val="accent1"/>
-          </a:fillRef>
-          <a:effectRef idx="0">
-            <a:schemeClr val="accent1"/>
-          </a:effectRef>
-          <a:fontRef idx="minor">
-            <a:schemeClr val="lt1"/>
-          </a:fontRef>
-        </p:style>
-        <p:txBody>
-          <a:bodyPr rtlCol="0" anchor="ctr"/>
-          <a:lstStyle/>
-          <a:p>
-            <a:pPr algn="ctr"/>
-            <a:r>
-              <a:rPr lang="en-US" sz="1600" b="1" dirty="0">
-                <a:latin typeface="Centaur" panose="02030504050205020304" pitchFamily="18" charset="77"/>
-              </a:rPr>
-              <a:t>Order details, Invoice, Proof of payment</a:t>
-            </a:r>
-          </a:p>
-        </p:txBody>
-      </p:sp>
-      <p:sp>
-        <p:nvSpPr>
-          <p:cNvPr id="13" name="Rounded Rectangle 12">
-            <a:extLst>
-              <a:ext uri="{FF2B5EF4-FFF2-40B4-BE49-F238E27FC236}">
-                <a16:creationId xmlns:a16="http://schemas.microsoft.com/office/drawing/2014/main" id="{BE1C499E-E80F-874B-8264-F7C7C6F99380}"/>
-              </a:ext>
-            </a:extLst>
-          </p:cNvPr>
-          <p:cNvSpPr/>
-          <p:nvPr/>
-        </p:nvSpPr>
-        <p:spPr>
-          <a:xfrm>
-            <a:off x="7301211" y="3994087"/>
-            <a:ext cx="1395576" cy="739836"/>
-          </a:xfrm>
-          <a:prstGeom prst="roundRect">
-            <a:avLst/>
-          </a:prstGeom>
-          <a:solidFill>
-            <a:srgbClr val="00B0F0"/>
-          </a:solidFill>
-          <a:ln>
-            <a:solidFill>
-              <a:srgbClr val="00B0F0"/>
-            </a:solidFill>
-          </a:ln>
-        </p:spPr>
-        <p:style>
-          <a:lnRef idx="2">
-            <a:schemeClr val="accent1">
-              <a:shade val="50000"/>
-            </a:schemeClr>
-          </a:lnRef>
-          <a:fillRef idx="1">
-            <a:schemeClr val="accent1"/>
-          </a:fillRef>
-          <a:effectRef idx="0">
-            <a:schemeClr val="accent1"/>
-          </a:effectRef>
-          <a:fontRef idx="minor">
-            <a:schemeClr val="lt1"/>
-          </a:fontRef>
-        </p:style>
-        <p:txBody>
-          <a:bodyPr rtlCol="0" anchor="ctr"/>
-          <a:lstStyle/>
-          <a:p>
-            <a:pPr algn="ctr"/>
-            <a:r>
-              <a:rPr lang="en-US" sz="1600" b="1" dirty="0">
-                <a:latin typeface="Centaur" panose="02030504050205020304" pitchFamily="18" charset="77"/>
-              </a:rPr>
-              <a:t>Order details, Invoice, Proof of payment, </a:t>
-            </a:r>
-          </a:p>
-        </p:txBody>
-      </p:sp>
-      <p:sp>
-        <p:nvSpPr>
-          <p:cNvPr id="14" name="TextBox 13">
-            <a:extLst>
-              <a:ext uri="{FF2B5EF4-FFF2-40B4-BE49-F238E27FC236}">
-                <a16:creationId xmlns:a16="http://schemas.microsoft.com/office/drawing/2014/main" id="{508D13A8-DA75-954D-83B1-1D3F66B5C90A}"/>
-              </a:ext>
-            </a:extLst>
-          </p:cNvPr>
-          <p:cNvSpPr txBox="1"/>
-          <p:nvPr/>
-        </p:nvSpPr>
-        <p:spPr>
-          <a:xfrm>
-            <a:off x="2347301" y="4652733"/>
-            <a:ext cx="1501886" cy="338554"/>
+            <a:off x="2305495" y="4791879"/>
+            <a:ext cx="1585499" cy="353943"/>
           </a:xfrm>
           <a:prstGeom prst="rect">
             <a:avLst/>
@@ -3943,7 +3712,7 @@
           <a:p>
             <a:pPr algn="ctr"/>
             <a:r>
-              <a:rPr lang="en-US" sz="1600" dirty="0">
+              <a:rPr lang="en-US" sz="1700" dirty="0">
                 <a:latin typeface="Centaur" panose="02030504050205020304" pitchFamily="18" charset="77"/>
               </a:rPr>
               <a:t>farmer &amp; supplier</a:t>
@@ -3965,8 +3734,8 @@
         </p:nvSpPr>
         <p:spPr>
           <a:xfrm>
-            <a:off x="4098109" y="4665673"/>
-            <a:ext cx="1166345" cy="584775"/>
+            <a:off x="3898880" y="4804819"/>
+            <a:ext cx="1226875" cy="615553"/>
           </a:xfrm>
           <a:prstGeom prst="rect">
             <a:avLst/>
@@ -3981,18 +3750,18 @@
           <a:p>
             <a:pPr algn="ctr"/>
             <a:r>
-              <a:rPr lang="en-US" sz="1600" dirty="0">
+              <a:rPr lang="en-US" sz="1700" dirty="0">
                 <a:latin typeface="Centaur" panose="02030504050205020304" pitchFamily="18" charset="77"/>
               </a:rPr>
               <a:t>   supplier &amp; </a:t>
             </a:r>
             <a:br>
-              <a:rPr lang="en-US" sz="1600" dirty="0">
+              <a:rPr lang="en-US" sz="1700" dirty="0">
                 <a:latin typeface="Centaur" panose="02030504050205020304" pitchFamily="18" charset="77"/>
               </a:rPr>
             </a:br>
             <a:r>
-              <a:rPr lang="en-US" sz="1600" dirty="0">
+              <a:rPr lang="en-US" sz="1700" dirty="0">
                 <a:latin typeface="Centaur" panose="02030504050205020304" pitchFamily="18" charset="77"/>
               </a:rPr>
               <a:t>manufacturer</a:t>
@@ -4014,8 +3783,8 @@
         </p:nvSpPr>
         <p:spPr>
           <a:xfrm>
-            <a:off x="5754972" y="4667577"/>
-            <a:ext cx="1395575" cy="584775"/>
+            <a:off x="5290114" y="4806723"/>
+            <a:ext cx="1470532" cy="615553"/>
           </a:xfrm>
           <a:prstGeom prst="rect">
             <a:avLst/>
@@ -4030,18 +3799,18 @@
           <a:p>
             <a:pPr algn="ctr"/>
             <a:r>
-              <a:rPr lang="en-US" sz="1600" dirty="0">
+              <a:rPr lang="en-US" sz="1700" dirty="0">
                 <a:latin typeface="Centaur" panose="02030504050205020304" pitchFamily="18" charset="77"/>
               </a:rPr>
               <a:t>manufacturer &amp; </a:t>
             </a:r>
             <a:br>
-              <a:rPr lang="en-US" sz="1600" dirty="0">
+              <a:rPr lang="en-US" sz="1700" dirty="0">
                 <a:latin typeface="Centaur" panose="02030504050205020304" pitchFamily="18" charset="77"/>
               </a:rPr>
             </a:br>
             <a:r>
-              <a:rPr lang="en-US" sz="1600" dirty="0">
+              <a:rPr lang="en-US" sz="1700" dirty="0">
                 <a:latin typeface="Centaur" panose="02030504050205020304" pitchFamily="18" charset="77"/>
               </a:rPr>
               <a:t>distributors</a:t>
@@ -4063,8 +3832,8 @@
         </p:nvSpPr>
         <p:spPr>
           <a:xfrm>
-            <a:off x="7395394" y="4652732"/>
-            <a:ext cx="1273426" cy="584775"/>
+            <a:off x="6785784" y="4807404"/>
+            <a:ext cx="1346972" cy="615553"/>
           </a:xfrm>
           <a:prstGeom prst="rect">
             <a:avLst/>
@@ -4079,18 +3848,18 @@
           <a:p>
             <a:pPr algn="ctr"/>
             <a:r>
-              <a:rPr lang="en-US" sz="1600" dirty="0">
+              <a:rPr lang="en-US" sz="1700" dirty="0">
                 <a:latin typeface="Centaur" panose="02030504050205020304" pitchFamily="18" charset="77"/>
               </a:rPr>
               <a:t>distributors &amp; </a:t>
             </a:r>
             <a:br>
-              <a:rPr lang="en-US" sz="1600" dirty="0">
+              <a:rPr lang="en-US" sz="1700" dirty="0">
                 <a:latin typeface="Centaur" panose="02030504050205020304" pitchFamily="18" charset="77"/>
               </a:rPr>
             </a:br>
             <a:r>
-              <a:rPr lang="en-US" sz="1600" dirty="0">
+              <a:rPr lang="en-US" sz="1700" dirty="0">
                 <a:latin typeface="Centaur" panose="02030504050205020304" pitchFamily="18" charset="77"/>
               </a:rPr>
               <a:t>retailer</a:t>
@@ -4112,7 +3881,7 @@
         </p:nvSpPr>
         <p:spPr>
           <a:xfrm>
-            <a:off x="4247921" y="5199550"/>
+            <a:off x="4247921" y="5338696"/>
             <a:ext cx="3100382" cy="338554"/>
           </a:xfrm>
           <a:prstGeom prst="rect">
@@ -4149,7 +3918,7 @@
         </p:nvSpPr>
         <p:spPr>
           <a:xfrm>
-            <a:off x="5371611" y="5929267"/>
+            <a:off x="5371611" y="5849755"/>
             <a:ext cx="2162295" cy="338554"/>
           </a:xfrm>
           <a:prstGeom prst="rect">
@@ -4172,88 +3941,6 @@
           </a:p>
         </p:txBody>
       </p:sp>
-      <p:sp>
-        <p:nvSpPr>
-          <p:cNvPr id="22" name="Rounded Rectangle 21">
-            <a:extLst>
-              <a:ext uri="{FF2B5EF4-FFF2-40B4-BE49-F238E27FC236}">
-                <a16:creationId xmlns:a16="http://schemas.microsoft.com/office/drawing/2014/main" id="{E44C0D4D-7202-1D4E-9082-9237A5A4D4E1}"/>
-              </a:ext>
-            </a:extLst>
-          </p:cNvPr>
-          <p:cNvSpPr/>
-          <p:nvPr/>
-        </p:nvSpPr>
-        <p:spPr>
-          <a:xfrm>
-            <a:off x="8847451" y="4002086"/>
-            <a:ext cx="1395576" cy="716988"/>
-          </a:xfrm>
-          <a:prstGeom prst="roundRect">
-            <a:avLst/>
-          </a:prstGeom>
-          <a:solidFill>
-            <a:srgbClr val="00B0F0"/>
-          </a:solidFill>
-          <a:ln>
-            <a:solidFill>
-              <a:srgbClr val="00B0F0"/>
-            </a:solidFill>
-          </a:ln>
-        </p:spPr>
-        <p:style>
-          <a:lnRef idx="2">
-            <a:schemeClr val="accent1">
-              <a:shade val="50000"/>
-            </a:schemeClr>
-          </a:lnRef>
-          <a:fillRef idx="1">
-            <a:schemeClr val="accent1"/>
-          </a:fillRef>
-          <a:effectRef idx="0">
-            <a:schemeClr val="accent1"/>
-          </a:effectRef>
-          <a:fontRef idx="minor">
-            <a:schemeClr val="lt1"/>
-          </a:fontRef>
-        </p:style>
-        <p:txBody>
-          <a:bodyPr rtlCol="0" anchor="ctr"/>
-          <a:lstStyle/>
-          <a:p>
-            <a:pPr algn="ctr"/>
-            <a:r>
-              <a:rPr lang="en-US" sz="1600" b="1" dirty="0">
-                <a:latin typeface="Centaur" panose="02030504050205020304" pitchFamily="18" charset="77"/>
-              </a:rPr>
-              <a:t>Sales record </a:t>
-            </a:r>
-            <a:br>
-              <a:rPr lang="en-US" sz="1600" b="1" dirty="0">
-                <a:latin typeface="Centaur" panose="02030504050205020304" pitchFamily="18" charset="77"/>
-              </a:rPr>
-            </a:br>
-            <a:r>
-              <a:rPr lang="en-US" sz="1600" b="1" dirty="0">
-                <a:latin typeface="Centaur" panose="02030504050205020304" pitchFamily="18" charset="77"/>
-              </a:rPr>
-              <a:t>(Customer -&gt; </a:t>
-            </a:r>
-            <a:r>
-              <a:rPr lang="en-US" sz="1600" b="1" dirty="0" err="1">
-                <a:latin typeface="Centaur" panose="02030504050205020304" pitchFamily="18" charset="77"/>
-              </a:rPr>
-              <a:t>Produc</a:t>
-            </a:r>
-            <a:r>
-              <a:rPr lang="en-US" sz="1600" b="1" dirty="0">
-                <a:latin typeface="Centaur" panose="02030504050205020304" pitchFamily="18" charset="77"/>
-              </a:rPr>
-              <a:t> IDs)</a:t>
-            </a:r>
-          </a:p>
-        </p:txBody>
-      </p:sp>
       <p:cxnSp>
         <p:nvCxnSpPr>
           <p:cNvPr id="24" name="Straight Connector 23">
@@ -4263,13 +3950,15 @@
               </a:ext>
             </a:extLst>
           </p:cNvPr>
-          <p:cNvCxnSpPr/>
+          <p:cNvCxnSpPr>
+            <a:cxnSpLocks/>
+          </p:cNvCxnSpPr>
           <p:nvPr/>
         </p:nvCxnSpPr>
         <p:spPr>
           <a:xfrm>
-            <a:off x="8766360" y="3984221"/>
-            <a:ext cx="0" cy="1215329"/>
+            <a:off x="8189896" y="3984221"/>
+            <a:ext cx="0" cy="1512118"/>
           </a:xfrm>
           <a:prstGeom prst="line">
             <a:avLst/>
@@ -4309,7 +3998,7 @@
         </p:nvSpPr>
         <p:spPr>
           <a:xfrm>
-            <a:off x="8743966" y="5015509"/>
+            <a:off x="8132018" y="5043895"/>
             <a:ext cx="1602545" cy="584775"/>
           </a:xfrm>
           <a:prstGeom prst="rect">
@@ -4340,6 +4029,361 @@
                 <a:latin typeface="Centaur" panose="02030504050205020304" pitchFamily="18" charset="77"/>
               </a:rPr>
               <a:t>Single Actor</a:t>
+            </a:r>
+          </a:p>
+        </p:txBody>
+      </p:sp>
+      <p:sp>
+        <p:nvSpPr>
+          <p:cNvPr id="2" name="Can 1">
+            <a:extLst>
+              <a:ext uri="{FF2B5EF4-FFF2-40B4-BE49-F238E27FC236}">
+                <a16:creationId xmlns:a16="http://schemas.microsoft.com/office/drawing/2014/main" id="{8CCFB2E9-ACDE-6B4F-87A0-A28DAAC77F3C}"/>
+              </a:ext>
+            </a:extLst>
+          </p:cNvPr>
+          <p:cNvSpPr/>
+          <p:nvPr/>
+        </p:nvSpPr>
+        <p:spPr>
+          <a:xfrm>
+            <a:off x="2418374" y="3999538"/>
+            <a:ext cx="1310996" cy="755599"/>
+          </a:xfrm>
+          <a:prstGeom prst="can">
+            <a:avLst/>
+          </a:prstGeom>
+          <a:solidFill>
+            <a:schemeClr val="bg1"/>
+          </a:solidFill>
+          <a:ln>
+            <a:solidFill>
+              <a:schemeClr val="bg1">
+                <a:lumMod val="50000"/>
+              </a:schemeClr>
+            </a:solidFill>
+          </a:ln>
+        </p:spPr>
+        <p:style>
+          <a:lnRef idx="2">
+            <a:schemeClr val="accent1">
+              <a:shade val="50000"/>
+            </a:schemeClr>
+          </a:lnRef>
+          <a:fillRef idx="1">
+            <a:schemeClr val="accent1"/>
+          </a:fillRef>
+          <a:effectRef idx="0">
+            <a:schemeClr val="accent1"/>
+          </a:effectRef>
+          <a:fontRef idx="minor">
+            <a:schemeClr val="lt1"/>
+          </a:fontRef>
+        </p:style>
+        <p:txBody>
+          <a:bodyPr rtlCol="0" anchor="ctr"/>
+          <a:lstStyle/>
+          <a:p>
+            <a:pPr algn="ctr"/>
+            <a:r>
+              <a:rPr lang="en-US" sz="1600" b="1" dirty="0">
+                <a:solidFill>
+                  <a:schemeClr val="tx1"/>
+                </a:solidFill>
+                <a:latin typeface="Centaur" panose="02030504050205020304" pitchFamily="18" charset="77"/>
+              </a:rPr>
+              <a:t>Order details, Invoice, Proof of payment</a:t>
+            </a:r>
+          </a:p>
+        </p:txBody>
+      </p:sp>
+      <p:sp>
+        <p:nvSpPr>
+          <p:cNvPr id="23" name="Can 22">
+            <a:extLst>
+              <a:ext uri="{FF2B5EF4-FFF2-40B4-BE49-F238E27FC236}">
+                <a16:creationId xmlns:a16="http://schemas.microsoft.com/office/drawing/2014/main" id="{CD5B4C38-C175-B649-8F26-79292638B46A}"/>
+              </a:ext>
+            </a:extLst>
+          </p:cNvPr>
+          <p:cNvSpPr/>
+          <p:nvPr/>
+        </p:nvSpPr>
+        <p:spPr>
+          <a:xfrm>
+            <a:off x="3875418" y="3982308"/>
+            <a:ext cx="1310996" cy="755599"/>
+          </a:xfrm>
+          <a:prstGeom prst="can">
+            <a:avLst/>
+          </a:prstGeom>
+          <a:solidFill>
+            <a:schemeClr val="bg1"/>
+          </a:solidFill>
+          <a:ln>
+            <a:solidFill>
+              <a:schemeClr val="bg1">
+                <a:lumMod val="50000"/>
+              </a:schemeClr>
+            </a:solidFill>
+          </a:ln>
+        </p:spPr>
+        <p:style>
+          <a:lnRef idx="2">
+            <a:schemeClr val="accent1">
+              <a:shade val="50000"/>
+            </a:schemeClr>
+          </a:lnRef>
+          <a:fillRef idx="1">
+            <a:schemeClr val="accent1"/>
+          </a:fillRef>
+          <a:effectRef idx="0">
+            <a:schemeClr val="accent1"/>
+          </a:effectRef>
+          <a:fontRef idx="minor">
+            <a:schemeClr val="lt1"/>
+          </a:fontRef>
+        </p:style>
+        <p:txBody>
+          <a:bodyPr rtlCol="0" anchor="ctr"/>
+          <a:lstStyle/>
+          <a:p>
+            <a:pPr algn="ctr"/>
+            <a:r>
+              <a:rPr lang="en-US" sz="1600" b="1" dirty="0">
+                <a:solidFill>
+                  <a:schemeClr val="tx1"/>
+                </a:solidFill>
+                <a:latin typeface="Centaur" panose="02030504050205020304" pitchFamily="18" charset="77"/>
+              </a:rPr>
+              <a:t>Order details, Invoice, Proof of payment</a:t>
+            </a:r>
+          </a:p>
+        </p:txBody>
+      </p:sp>
+      <p:sp>
+        <p:nvSpPr>
+          <p:cNvPr id="26" name="Can 25">
+            <a:extLst>
+              <a:ext uri="{FF2B5EF4-FFF2-40B4-BE49-F238E27FC236}">
+                <a16:creationId xmlns:a16="http://schemas.microsoft.com/office/drawing/2014/main" id="{523A0115-0A6A-CD4E-A0FD-43F18A7AB105}"/>
+              </a:ext>
+            </a:extLst>
+          </p:cNvPr>
+          <p:cNvSpPr/>
+          <p:nvPr/>
+        </p:nvSpPr>
+        <p:spPr>
+          <a:xfrm>
+            <a:off x="5368771" y="3993804"/>
+            <a:ext cx="1310996" cy="755599"/>
+          </a:xfrm>
+          <a:prstGeom prst="can">
+            <a:avLst/>
+          </a:prstGeom>
+          <a:solidFill>
+            <a:schemeClr val="bg1"/>
+          </a:solidFill>
+          <a:ln>
+            <a:solidFill>
+              <a:schemeClr val="bg1">
+                <a:lumMod val="50000"/>
+              </a:schemeClr>
+            </a:solidFill>
+          </a:ln>
+        </p:spPr>
+        <p:style>
+          <a:lnRef idx="2">
+            <a:schemeClr val="accent1">
+              <a:shade val="50000"/>
+            </a:schemeClr>
+          </a:lnRef>
+          <a:fillRef idx="1">
+            <a:schemeClr val="accent1"/>
+          </a:fillRef>
+          <a:effectRef idx="0">
+            <a:schemeClr val="accent1"/>
+          </a:effectRef>
+          <a:fontRef idx="minor">
+            <a:schemeClr val="lt1"/>
+          </a:fontRef>
+        </p:style>
+        <p:txBody>
+          <a:bodyPr rtlCol="0" anchor="ctr"/>
+          <a:lstStyle/>
+          <a:p>
+            <a:pPr algn="ctr"/>
+            <a:r>
+              <a:rPr lang="en-US" sz="1600" b="1" dirty="0">
+                <a:solidFill>
+                  <a:schemeClr val="tx1"/>
+                </a:solidFill>
+                <a:latin typeface="Centaur" panose="02030504050205020304" pitchFamily="18" charset="77"/>
+              </a:rPr>
+              <a:t>Order details, Invoice, Proof of payment</a:t>
+            </a:r>
+          </a:p>
+        </p:txBody>
+      </p:sp>
+      <p:sp>
+        <p:nvSpPr>
+          <p:cNvPr id="27" name="Can 26">
+            <a:extLst>
+              <a:ext uri="{FF2B5EF4-FFF2-40B4-BE49-F238E27FC236}">
+                <a16:creationId xmlns:a16="http://schemas.microsoft.com/office/drawing/2014/main" id="{E9A3BED5-A503-BA43-8251-AB164B3450AF}"/>
+              </a:ext>
+            </a:extLst>
+          </p:cNvPr>
+          <p:cNvSpPr/>
+          <p:nvPr/>
+        </p:nvSpPr>
+        <p:spPr>
+          <a:xfrm>
+            <a:off x="6780534" y="3987855"/>
+            <a:ext cx="1310996" cy="755599"/>
+          </a:xfrm>
+          <a:prstGeom prst="can">
+            <a:avLst/>
+          </a:prstGeom>
+          <a:solidFill>
+            <a:schemeClr val="bg1"/>
+          </a:solidFill>
+          <a:ln>
+            <a:solidFill>
+              <a:schemeClr val="bg1">
+                <a:lumMod val="50000"/>
+              </a:schemeClr>
+            </a:solidFill>
+          </a:ln>
+        </p:spPr>
+        <p:style>
+          <a:lnRef idx="2">
+            <a:schemeClr val="accent1">
+              <a:shade val="50000"/>
+            </a:schemeClr>
+          </a:lnRef>
+          <a:fillRef idx="1">
+            <a:schemeClr val="accent1"/>
+          </a:fillRef>
+          <a:effectRef idx="0">
+            <a:schemeClr val="accent1"/>
+          </a:effectRef>
+          <a:fontRef idx="minor">
+            <a:schemeClr val="lt1"/>
+          </a:fontRef>
+        </p:style>
+        <p:txBody>
+          <a:bodyPr rtlCol="0" anchor="ctr"/>
+          <a:lstStyle/>
+          <a:p>
+            <a:pPr algn="ctr"/>
+            <a:r>
+              <a:rPr lang="en-US" sz="1600" b="1" dirty="0">
+                <a:solidFill>
+                  <a:schemeClr val="tx1"/>
+                </a:solidFill>
+                <a:latin typeface="Centaur" panose="02030504050205020304" pitchFamily="18" charset="77"/>
+              </a:rPr>
+              <a:t>Order details, Invoice, Proof of payment</a:t>
+            </a:r>
+          </a:p>
+        </p:txBody>
+      </p:sp>
+      <p:sp>
+        <p:nvSpPr>
+          <p:cNvPr id="28" name="Can 27">
+            <a:extLst>
+              <a:ext uri="{FF2B5EF4-FFF2-40B4-BE49-F238E27FC236}">
+                <a16:creationId xmlns:a16="http://schemas.microsoft.com/office/drawing/2014/main" id="{9CBD9375-1BF3-7348-B222-A90DCBE86B71}"/>
+              </a:ext>
+            </a:extLst>
+          </p:cNvPr>
+          <p:cNvSpPr/>
+          <p:nvPr/>
+        </p:nvSpPr>
+        <p:spPr>
+          <a:xfrm>
+            <a:off x="8287731" y="3975637"/>
+            <a:ext cx="1310996" cy="755599"/>
+          </a:xfrm>
+          <a:prstGeom prst="can">
+            <a:avLst/>
+          </a:prstGeom>
+          <a:solidFill>
+            <a:schemeClr val="bg1"/>
+          </a:solidFill>
+          <a:ln>
+            <a:solidFill>
+              <a:schemeClr val="bg1">
+                <a:lumMod val="50000"/>
+              </a:schemeClr>
+            </a:solidFill>
+          </a:ln>
+        </p:spPr>
+        <p:style>
+          <a:lnRef idx="2">
+            <a:schemeClr val="accent1">
+              <a:shade val="50000"/>
+            </a:schemeClr>
+          </a:lnRef>
+          <a:fillRef idx="1">
+            <a:schemeClr val="accent1"/>
+          </a:fillRef>
+          <a:effectRef idx="0">
+            <a:schemeClr val="accent1"/>
+          </a:effectRef>
+          <a:fontRef idx="minor">
+            <a:schemeClr val="lt1"/>
+          </a:fontRef>
+        </p:style>
+        <p:txBody>
+          <a:bodyPr rtlCol="0" anchor="ctr"/>
+          <a:lstStyle/>
+          <a:p>
+            <a:pPr algn="ctr"/>
+            <a:r>
+              <a:rPr lang="en-US" sz="1600" b="1" dirty="0">
+                <a:solidFill>
+                  <a:schemeClr val="tx1"/>
+                </a:solidFill>
+                <a:latin typeface="Centaur" panose="02030504050205020304" pitchFamily="18" charset="77"/>
+              </a:rPr>
+              <a:t>Sales record </a:t>
+            </a:r>
+            <a:br>
+              <a:rPr lang="en-US" sz="1600" b="1" dirty="0">
+                <a:solidFill>
+                  <a:schemeClr val="tx1"/>
+                </a:solidFill>
+                <a:latin typeface="Centaur" panose="02030504050205020304" pitchFamily="18" charset="77"/>
+              </a:rPr>
+            </a:br>
+            <a:r>
+              <a:rPr lang="en-US" sz="1600" b="1" dirty="0">
+                <a:solidFill>
+                  <a:schemeClr val="tx1"/>
+                </a:solidFill>
+                <a:latin typeface="Centaur" panose="02030504050205020304" pitchFamily="18" charset="77"/>
+              </a:rPr>
+              <a:t>(Customer -&gt; </a:t>
+            </a:r>
+            <a:r>
+              <a:rPr lang="en-US" sz="1600" b="1" dirty="0" err="1">
+                <a:solidFill>
+                  <a:schemeClr val="tx1"/>
+                </a:solidFill>
+                <a:latin typeface="Centaur" panose="02030504050205020304" pitchFamily="18" charset="77"/>
+              </a:rPr>
+              <a:t>Produc</a:t>
+            </a:r>
+            <a:r>
+              <a:rPr lang="en-US" sz="1600" b="1" dirty="0">
+                <a:solidFill>
+                  <a:schemeClr val="tx1"/>
+                </a:solidFill>
+                <a:latin typeface="Centaur" panose="02030504050205020304" pitchFamily="18" charset="77"/>
+              </a:rPr>
+              <a:t> IDs)</a:t>
             </a:r>
           </a:p>
         </p:txBody>
